--- a/data/documents/pptx/volta7_ramp_status.pptx
+++ b/data/documents/pptx/volta7_ramp_status.pptx
@@ -508,7 +508,7 @@
           <a:lstStyle/>
           <a:p>
             <a:r>
-              <a:t>This briefing summarizes our NPI recovery posture following the Rev A HTOL excursion. Our critical path is tightly coupled to the April 21 Rev B silicon dock date.</a:t>
+              <a:t>This briefing summarizes our NPI recovery posture following the Rev A HTOL excursion. Our critical path is tightly coupled to the April 19 Rev B silicon dock date.</a:t>
             </a:r>
           </a:p>
         </p:txBody>
@@ -788,7 +788,7 @@
           <a:lstStyle/>
           <a:p>
             <a:r>
-              <a:t>Tom Harris has managed customer communications flawlessly. NovaDrive is holding their vehicle line for us, but May 12 is their non-negotiable deadline.</a:t>
+              <a:t>Tom Harris has managed customer communications flawlessly. NovaDrive is holding their vehicle line for us, but May 10 is their non-negotiable deadline.</a:t>
             </a:r>
           </a:p>
         </p:txBody>
@@ -3885,7 +3885,7 @@
           <a:lstStyle/>
           <a:p>
             <a:r>
-              <a:t>Volta-7 Ramp Status — March 2024</a:t>
+              <a:t>Volta-7 Ramp Status — March 2026</a:t>
             </a:r>
           </a:p>
         </p:txBody>
@@ -3936,7 +3936,7 @@
             </a:r>
             <a:r>
               <a:rPr sz="1800" b="0" i="0"/>
-              <a:t> March 29, 2024</a:t>
+              <a:t> March 27, 2026</a:t>
             </a:r>
           </a:p>
         </p:txBody>
@@ -4024,7 +4024,7 @@
             </a:r>
             <a:r>
               <a:rPr sz="2000" b="0" i="0"/>
-              <a:t> NovaDrive Motors Inc. (Platform: 2025 EV Drivetrain)</a:t>
+              <a:t> NovaDrive Motors Inc. (Platform: 2027 EV Drivetrain)</a:t>
             </a:r>
           </a:p>
           <a:p>
@@ -4069,7 +4069,7 @@
             </a:r>
             <a:r>
               <a:rPr sz="1800" b="0" i="0"/>
-              <a:t> Re-opened for Rev B Tape-out (Masks released Mar 23).</a:t>
+              <a:t> Re-opened for Rev B Tape-out (Masks released Mar 21).</a:t>
             </a:r>
           </a:p>
           <a:p>
@@ -4175,7 +4175,7 @@
             </a:r>
             <a:r>
               <a:rPr sz="1600" b="0" i="0"/>
-              <a:t> Completed Nov 20, 2023 [Status: Green]</a:t>
+              <a:t> Completed Nov 17, 2025 [Status: Green]</a:t>
             </a:r>
           </a:p>
           <a:p>
@@ -4186,7 +4186,7 @@
             </a:r>
             <a:r>
               <a:rPr sz="1600" b="0" i="0"/>
-              <a:t> Completed Jan 15, 2024 — Yield 41.2% [Status: Red / Recovered to Yellow]</a:t>
+              <a:t> Completed Jan 12, 2026 — Yield 41.2% [Status: Red / Recovered to Yellow]</a:t>
             </a:r>
           </a:p>
           <a:p>
@@ -4197,7 +4197,7 @@
             </a:r>
             <a:r>
               <a:rPr sz="1600" b="0" i="0"/>
-              <a:t> Completed Mar 01, 2024 [Status: Green]</a:t>
+              <a:t> Completed Feb 27, 2026 [Status: Green]</a:t>
             </a:r>
           </a:p>
           <a:p>
@@ -4208,7 +4208,7 @@
             </a:r>
             <a:r>
               <a:rPr sz="1600" b="0" i="0"/>
-              <a:t> FAILED Mar 11, 2024 [Status: RED]</a:t>
+              <a:t> FAILED Mar 9, 2026 [Status: RED]</a:t>
             </a:r>
           </a:p>
           <a:p>
@@ -4219,7 +4219,7 @@
             </a:r>
             <a:r>
               <a:rPr sz="1600" b="0" i="0"/>
-              <a:t> Completed Mar 23, 2024 [Status: Green]</a:t>
+              <a:t> Completed Mar 21, 2026 [Status: Green]</a:t>
             </a:r>
           </a:p>
           <a:p>
@@ -4230,7 +4230,7 @@
             </a:r>
             <a:r>
               <a:rPr sz="1600" b="0" i="0"/>
-              <a:t> Target Apr 21, 2024 [Status: Yellow / Tracking on-time]</a:t>
+              <a:t> Target Apr 19, 2026 [Status: Yellow / Tracking on-time]</a:t>
             </a:r>
           </a:p>
           <a:p>
@@ -4241,7 +4241,7 @@
             </a:r>
             <a:r>
               <a:rPr sz="1600" b="0" i="0"/>
-              <a:t> Target May 12, 2024 [Status: Yellow]</a:t>
+              <a:t> Target May 10, 2026 [Status: Yellow]</a:t>
             </a:r>
           </a:p>
           <a:p>
@@ -4252,7 +4252,7 @@
             </a:r>
             <a:r>
               <a:rPr sz="1600" b="0" i="0"/>
-              <a:t> Target June 2024 [Status: Yellow]</a:t>
+              <a:t> Target June 2026 [Status: Yellow]</a:t>
             </a:r>
           </a:p>
         </p:txBody>
@@ -4329,7 +4329,7 @@
             </a:r>
             <a:r>
               <a:rPr sz="1800" b="0" i="0"/>
-              <a:t> 3 units failed at 500-hour HTOL readout (U042, U089, U115 from Lot LOT-V7-008).</a:t>
+              <a:t> 3 units failed at 500-hour HTOL readout (U162, U189, U215 from Lot LOT-V7-005).</a:t>
             </a:r>
           </a:p>
           <a:p>
@@ -4465,7 +4465,7 @@
             <a:pPr lvl="1"/>
             <a:r>
               <a:rPr sz="1600" b="0" i="0"/>
-              <a:t>Rev B requires only 4 mask changes: Active, Contact, Metal 1, Via 1, Metal 2.</a:t>
+              <a:t>Rev B requires only 4 mask changes: Contact, Metal 1, Via 1, Metal 2.</a:t>
             </a:r>
           </a:p>
           <a:p>
@@ -4479,7 +4479,7 @@
             <a:pPr lvl="1"/>
             <a:r>
               <a:rPr sz="1600" b="0" i="1"/>
-              <a:t>March 23:</a:t>
+              <a:t>March 21:</a:t>
             </a:r>
             <a:r>
               <a:rPr sz="1600" b="0" i="0"/>
@@ -4490,7 +4490,7 @@
             <a:pPr lvl="1"/>
             <a:r>
               <a:rPr sz="1600" b="0" i="1"/>
-              <a:t>March 27:</a:t>
+              <a:t>March 25:</a:t>
             </a:r>
             <a:r>
               <a:rPr sz="1600" b="0" i="0"/>
@@ -4501,7 +4501,7 @@
             <a:pPr lvl="1"/>
             <a:r>
               <a:rPr sz="1600" b="0" i="1"/>
-              <a:t>March 28 – April 18:</a:t>
+              <a:t>March 26 – April 16:</a:t>
             </a:r>
             <a:r>
               <a:rPr sz="1600" b="0" i="0"/>
@@ -4512,7 +4512,7 @@
             <a:pPr lvl="1"/>
             <a:r>
               <a:rPr sz="1600" b="0" i="1"/>
-              <a:t>April 19:</a:t>
+              <a:t>April 17:</a:t>
             </a:r>
             <a:r>
               <a:rPr sz="1600" b="0" i="0"/>
@@ -4523,7 +4523,7 @@
             <a:pPr lvl="1"/>
             <a:r>
               <a:rPr sz="1600" b="0" i="1"/>
-              <a:t>April 20:</a:t>
+              <a:t>April 18:</a:t>
             </a:r>
             <a:r>
               <a:rPr sz="1600" b="0" i="0"/>
@@ -4534,7 +4534,7 @@
             <a:pPr lvl="1"/>
             <a:r>
               <a:rPr sz="1600" b="0" i="1"/>
-              <a:t>April 21:</a:t>
+              <a:t>April 19:</a:t>
             </a:r>
             <a:r>
               <a:rPr sz="1600" b="0" i="0"/>
@@ -4622,7 +4622,7 @@
             </a:r>
             <a:r>
               <a:rPr sz="1800" b="0" i="0"/>
-              <a:t> Shipped Mar 01. Quarantined to room-temp lab evaluation.</a:t>
+              <a:t> Shipped Feb 27. Quarantined to room-temp lab evaluation.</a:t>
             </a:r>
           </a:p>
           <a:p>
@@ -4633,7 +4633,7 @@
             </a:r>
             <a:r>
               <a:rPr sz="1800" b="0" i="0"/>
-              <a:t> D1–D5 delivery committed for April 07.</a:t>
+              <a:t> D1–D5 delivery committed for April 05.</a:t>
             </a:r>
           </a:p>
           <a:p>
@@ -4644,7 +4644,7 @@
             </a:r>
             <a:r>
               <a:rPr sz="1800" b="0" i="0"/>
-              <a:t> 100 fully screened QFN-48 units scheduled for delivery April 25.</a:t>
+              <a:t> 100 fully screened QFN-48 units scheduled for delivery April 23.</a:t>
             </a:r>
           </a:p>
           <a:p>
@@ -4655,7 +4655,7 @@
             </a:r>
             <a:r>
               <a:rPr sz="1800" b="0" i="0"/>
-              <a:t> Level 3 documentation submission scheduled for May 10.</a:t>
+              <a:t> Level 3 documentation submission scheduled for May 8.</a:t>
             </a:r>
           </a:p>
           <a:p>
@@ -4666,7 +4666,7 @@
             </a:r>
             <a:r>
               <a:rPr sz="1800" b="0" i="0"/>
-              <a:t> Austin facility audit confirmed for May 12.</a:t>
+              <a:t> Austin facility audit confirmed for May 10.</a:t>
             </a:r>
           </a:p>
           <a:p>
@@ -4804,14 +4804,14 @@
             <a:pPr lvl="1"/>
             <a:r>
               <a:rPr sz="1800" b="0" i="0"/>
-              <a:t>Zero failures across 231 units in accelerated reliability screening.</a:t>
+              <a:t>Zero failures in Rev B early-life and HAST screening, with HTOL on track for 1000 hours.</a:t>
             </a:r>
           </a:p>
           <a:p>
             <a:pPr lvl="1"/>
             <a:r>
               <a:rPr sz="1800" b="0" i="0"/>
-              <a:t>Closure of 8D report CAR-2024-ND01.</a:t>
+              <a:t>Closure of 8D report CAR-2026-ND01.</a:t>
             </a:r>
           </a:p>
         </p:txBody>
